--- a/media/exports/reports/2026-06/growth-services.pptx
+++ b/media/exports/reports/2026-06/growth-services.pptx
@@ -237,67 +237,67 @@
                 <c:formatCode>$#,##0;[Red]($#,##0);"-"</c:formatCode>
                 <c:ptCount val="21"/>
                 <c:pt idx="0">
-                  <c:v>94520</c:v>
+                  <c:v>103550</c:v>
                 </c:pt>
                 <c:pt idx="1">
-                  <c:v>108140</c:v>
+                  <c:v>118390</c:v>
                 </c:pt>
                 <c:pt idx="2">
-                  <c:v>114895</c:v>
+                  <c:v>125715</c:v>
                 </c:pt>
                 <c:pt idx="3">
-                  <c:v>88250</c:v>
+                  <c:v>96560</c:v>
                 </c:pt>
                 <c:pt idx="4">
-                  <c:v>111010</c:v>
+                  <c:v>121275</c:v>
                 </c:pt>
                 <c:pt idx="5">
-                  <c:v>77175</c:v>
+                  <c:v>84340</c:v>
                 </c:pt>
                 <c:pt idx="6">
-                  <c:v>63970</c:v>
+                  <c:v>69985</c:v>
                 </c:pt>
                 <c:pt idx="7">
-                  <c:v>95555</c:v>
+                  <c:v>104970</c:v>
                 </c:pt>
                 <c:pt idx="8">
-                  <c:v>90220</c:v>
+                  <c:v>99060</c:v>
                 </c:pt>
                 <c:pt idx="9">
-                  <c:v>86320</c:v>
+                  <c:v>94805</c:v>
                 </c:pt>
                 <c:pt idx="10">
-                  <c:v>61475</c:v>
+                  <c:v>67745</c:v>
                 </c:pt>
                 <c:pt idx="11">
-                  <c:v>59535</c:v>
+                  <c:v>65650</c:v>
                 </c:pt>
                 <c:pt idx="12">
-                  <c:v>71260</c:v>
+                  <c:v>78550</c:v>
                 </c:pt>
                 <c:pt idx="13">
-                  <c:v>83940</c:v>
+                  <c:v>92575</c:v>
                 </c:pt>
                 <c:pt idx="14">
-                  <c:v>69420</c:v>
+                  <c:v>76600</c:v>
                 </c:pt>
                 <c:pt idx="15">
-                  <c:v>92370</c:v>
+                  <c:v>102350</c:v>
                 </c:pt>
                 <c:pt idx="16">
-                  <c:v>100055</c:v>
+                  <c:v>110835</c:v>
                 </c:pt>
                 <c:pt idx="17">
-                  <c:v>109865</c:v>
+                  <c:v>121215</c:v>
                 </c:pt>
                 <c:pt idx="18">
-                  <c:v>80590</c:v>
+                  <c:v>88665</c:v>
                 </c:pt>
                 <c:pt idx="19">
-                  <c:v>77090</c:v>
+                  <c:v>84920</c:v>
                 </c:pt>
                 <c:pt idx="20">
-                  <c:v>115550</c:v>
+                  <c:v>127580</c:v>
                 </c:pt>
               </c:numCache>
             </c:numRef>
@@ -346,7 +346,7 @@
         <c:axId val="-2100718248"/>
         <c:scaling>
           <c:orientation val="minMax"/>
-          <c:max val="125000.0"/>
+          <c:max val="150000.0"/>
           <c:min val="0.0"/>
         </c:scaling>
         <c:delete val="0"/>
@@ -381,7 +381,7 @@
         <c:crossAx val="-2101159928"/>
         <c:crosses val="autoZero"/>
         <c:crossBetween val="midCat"/>
-        <c:majorUnit val="25000.0"/>
+        <c:majorUnit val="50000.0"/>
       </c:valAx>
     </c:plotArea>
     <c:plotVisOnly val="1"/>
@@ -531,67 +531,67 @@
                 <c:formatCode>$#,##0;[Red]($#,##0);"-"</c:formatCode>
                 <c:ptCount val="21"/>
                 <c:pt idx="0">
-                  <c:v>70720</c:v>
+                  <c:v>77350</c:v>
                 </c:pt>
                 <c:pt idx="1">
-                  <c:v>88540</c:v>
+                  <c:v>96790</c:v>
                 </c:pt>
                 <c:pt idx="2">
-                  <c:v>94695</c:v>
+                  <c:v>103515</c:v>
                 </c:pt>
                 <c:pt idx="3">
-                  <c:v>66850</c:v>
+                  <c:v>73060</c:v>
                 </c:pt>
                 <c:pt idx="4">
-                  <c:v>84410</c:v>
+                  <c:v>92075</c:v>
                 </c:pt>
                 <c:pt idx="5">
-                  <c:v>48975</c:v>
+                  <c:v>53340</c:v>
                 </c:pt>
                 <c:pt idx="6">
-                  <c:v>37570</c:v>
+                  <c:v>40885</c:v>
                 </c:pt>
                 <c:pt idx="7">
-                  <c:v>59755</c:v>
+                  <c:v>65570</c:v>
                 </c:pt>
                 <c:pt idx="8">
-                  <c:v>64520</c:v>
+                  <c:v>70760</c:v>
                 </c:pt>
                 <c:pt idx="9">
-                  <c:v>64820</c:v>
+                  <c:v>71205</c:v>
                 </c:pt>
                 <c:pt idx="10">
-                  <c:v>38775</c:v>
+                  <c:v>42845</c:v>
                 </c:pt>
                 <c:pt idx="11">
-                  <c:v>38035</c:v>
+                  <c:v>42050</c:v>
                 </c:pt>
                 <c:pt idx="12">
-                  <c:v>45860</c:v>
+                  <c:v>50650</c:v>
                 </c:pt>
                 <c:pt idx="13">
-                  <c:v>46840</c:v>
+                  <c:v>51775</c:v>
                 </c:pt>
                 <c:pt idx="14">
-                  <c:v>29520</c:v>
+                  <c:v>32800</c:v>
                 </c:pt>
                 <c:pt idx="15">
-                  <c:v>60170</c:v>
+                  <c:v>66950</c:v>
                 </c:pt>
                 <c:pt idx="16">
-                  <c:v>62955</c:v>
+                  <c:v>70035</c:v>
                 </c:pt>
                 <c:pt idx="17">
-                  <c:v>75165</c:v>
+                  <c:v>83115</c:v>
                 </c:pt>
                 <c:pt idx="18">
-                  <c:v>47090</c:v>
+                  <c:v>51865</c:v>
                 </c:pt>
                 <c:pt idx="19">
-                  <c:v>43590</c:v>
+                  <c:v>48120</c:v>
                 </c:pt>
                 <c:pt idx="20">
-                  <c:v>76650</c:v>
+                  <c:v>84880</c:v>
                 </c:pt>
               </c:numCache>
             </c:numRef>
@@ -640,7 +640,7 @@
         <c:axId val="-2100718248"/>
         <c:scaling>
           <c:orientation val="minMax"/>
-          <c:max val="100000.0"/>
+          <c:max val="125000.0"/>
           <c:min val="0.0"/>
         </c:scaling>
         <c:delete val="0"/>
@@ -675,7 +675,7 @@
         <c:crossAx val="-2101159928"/>
         <c:crosses val="autoZero"/>
         <c:crossBetween val="midCat"/>
-        <c:majorUnit val="20000.0"/>
+        <c:majorUnit val="25000.0"/>
       </c:valAx>
     </c:plotArea>
     <c:plotVisOnly val="1"/>
@@ -825,67 +825,67 @@
                 <c:formatCode>$#,##0;[Red]($#,##0);"-"</c:formatCode>
                 <c:ptCount val="21"/>
                 <c:pt idx="0">
-                  <c:v>15000</c:v>
+                  <c:v>16500</c:v>
                 </c:pt>
                 <c:pt idx="1">
-                  <c:v>15000</c:v>
+                  <c:v>16500</c:v>
                 </c:pt>
                 <c:pt idx="2">
-                  <c:v>15000</c:v>
+                  <c:v>16500</c:v>
                 </c:pt>
                 <c:pt idx="3">
-                  <c:v>15000</c:v>
+                  <c:v>16500</c:v>
                 </c:pt>
                 <c:pt idx="4">
-                  <c:v>15000</c:v>
+                  <c:v>16500</c:v>
                 </c:pt>
                 <c:pt idx="5">
-                  <c:v>21800</c:v>
+                  <c:v>24000</c:v>
                 </c:pt>
                 <c:pt idx="6">
-                  <c:v>21800</c:v>
+                  <c:v>24000</c:v>
                 </c:pt>
                 <c:pt idx="7">
-                  <c:v>21800</c:v>
+                  <c:v>24000</c:v>
                 </c:pt>
                 <c:pt idx="8">
-                  <c:v>21800</c:v>
+                  <c:v>24000</c:v>
                 </c:pt>
                 <c:pt idx="9">
-                  <c:v>16300</c:v>
+                  <c:v>17900</c:v>
                 </c:pt>
                 <c:pt idx="10">
-                  <c:v>16300</c:v>
+                  <c:v>17900</c:v>
                 </c:pt>
                 <c:pt idx="11">
-                  <c:v>16300</c:v>
+                  <c:v>17900</c:v>
                 </c:pt>
                 <c:pt idx="12">
-                  <c:v>16300</c:v>
+                  <c:v>17900</c:v>
                 </c:pt>
                 <c:pt idx="13">
-                  <c:v>28300</c:v>
+                  <c:v>31100</c:v>
                 </c:pt>
                 <c:pt idx="14">
-                  <c:v>28300</c:v>
+                  <c:v>31100</c:v>
                 </c:pt>
                 <c:pt idx="15">
-                  <c:v>28300</c:v>
+                  <c:v>31100</c:v>
                 </c:pt>
                 <c:pt idx="16">
-                  <c:v>28300</c:v>
+                  <c:v>31100</c:v>
                 </c:pt>
                 <c:pt idx="17">
-                  <c:v>28300</c:v>
+                  <c:v>31100</c:v>
                 </c:pt>
                 <c:pt idx="18">
-                  <c:v>28300</c:v>
+                  <c:v>31100</c:v>
                 </c:pt>
                 <c:pt idx="19">
-                  <c:v>28300</c:v>
+                  <c:v>31100</c:v>
                 </c:pt>
                 <c:pt idx="20">
-                  <c:v>32500</c:v>
+                  <c:v>35700</c:v>
                 </c:pt>
               </c:numCache>
             </c:numRef>
@@ -1119,67 +1119,67 @@
                 <c:formatCode>$#,##0;[Red]($#,##0);"-"</c:formatCode>
                 <c:ptCount val="21"/>
                 <c:pt idx="0">
-                  <c:v>8800</c:v>
+                  <c:v>9700</c:v>
                 </c:pt>
                 <c:pt idx="1">
-                  <c:v>4600</c:v>
+                  <c:v>5100</c:v>
                 </c:pt>
                 <c:pt idx="2">
-                  <c:v>5200</c:v>
+                  <c:v>5700</c:v>
                 </c:pt>
                 <c:pt idx="3">
-                  <c:v>6400</c:v>
+                  <c:v>7000</c:v>
                 </c:pt>
                 <c:pt idx="4">
-                  <c:v>11600</c:v>
+                  <c:v>12700</c:v>
                 </c:pt>
                 <c:pt idx="5">
-                  <c:v>6400</c:v>
+                  <c:v>7000</c:v>
                 </c:pt>
                 <c:pt idx="6">
-                  <c:v>4600</c:v>
+                  <c:v>5100</c:v>
                 </c:pt>
                 <c:pt idx="7">
-                  <c:v>14000</c:v>
+                  <c:v>15400</c:v>
                 </c:pt>
                 <c:pt idx="8">
-                  <c:v>3900</c:v>
+                  <c:v>4300</c:v>
                 </c:pt>
                 <c:pt idx="9">
-                  <c:v>5200</c:v>
+                  <c:v>5700</c:v>
                 </c:pt>
                 <c:pt idx="10">
-                  <c:v>6400</c:v>
+                  <c:v>7000</c:v>
                 </c:pt>
                 <c:pt idx="11">
-                  <c:v>5200</c:v>
+                  <c:v>5700</c:v>
                 </c:pt>
                 <c:pt idx="12">
-                  <c:v>9100</c:v>
+                  <c:v>10000</c:v>
                 </c:pt>
                 <c:pt idx="13">
-                  <c:v>8800</c:v>
+                  <c:v>9700</c:v>
                 </c:pt>
                 <c:pt idx="14">
-                  <c:v>11600</c:v>
+                  <c:v>12700</c:v>
                 </c:pt>
                 <c:pt idx="15">
-                  <c:v>3900</c:v>
+                  <c:v>4300</c:v>
                 </c:pt>
                 <c:pt idx="16">
-                  <c:v>8800</c:v>
+                  <c:v>9700</c:v>
                 </c:pt>
                 <c:pt idx="17">
-                  <c:v>6400</c:v>
+                  <c:v>7000</c:v>
                 </c:pt>
                 <c:pt idx="18">
-                  <c:v>5200</c:v>
+                  <c:v>5700</c:v>
                 </c:pt>
                 <c:pt idx="19">
-                  <c:v>5200</c:v>
+                  <c:v>5700</c:v>
                 </c:pt>
                 <c:pt idx="20">
-                  <c:v>6400</c:v>
+                  <c:v>7000</c:v>
                 </c:pt>
               </c:numCache>
             </c:numRef>
@@ -1228,7 +1228,7 @@
         <c:axId val="-2100718248"/>
         <c:scaling>
           <c:orientation val="minMax"/>
-          <c:max val="15000.0"/>
+          <c:max val="20000.0"/>
           <c:min val="0.0"/>
         </c:scaling>
         <c:delete val="0"/>
@@ -1753,7 +1753,7 @@
           <a:lstStyle/>
           <a:p>
             <a:r>
-              <a:t>Services · All. June against June last year: 28.1%; Year to date (Jul to Jun 2026): $1,007,470; Gross margin, year to date: 63.6%. Revenue is $1,007,470 this financial year to date (Jul to Jun 2026). Training makes the highest gross margin (74.5%); Projects the lowest (61.3%). The business needs 51.0% gross margin just to cover overheads. Projects: 61.3% gross margin, 21.3 points over the 40.0% target ($134,082 ahead on $629,470 this financial year to date). Training: 74.5% gross margin, 34.5 points over the 40.0% target ($28,320 ahead on $82,200 this financial year to date).</a:t>
+              <a:t>Services · All. June against June last year: 28.8%; Year to date (Jul to Jun 2026): $1,111,490; Gross margin, year to date: 67.0%. Revenue is $1,111,490 this financial year to date (Jul to Jun 2026). Training makes the highest gross margin (76.7%); Projects the lowest (65.0%). The business needs 56.9% gross margin just to cover overheads. Projects: 65.0% gross margin, 25.0 points over the 40.0% target ($174,174 ahead on $696,290 this financial year to date). Training: 76.7% gross margin, 36.7 points over the 40.0% target ($33,120 ahead on $90,200 this financial year to date).</a:t>
             </a:r>
           </a:p>
         </p:txBody>
@@ -1823,7 +1823,7 @@
           <a:lstStyle/>
           <a:p>
             <a:r>
-              <a:t>Services · Projects. June against June last year: 18.8%; Year to date (Jul to Jun 2026): $629,470; Gross margin, year to date: 61.3%. Projects brought in $629,470 this financial year to date, at a 61.3% gross margin (below the 63.6% overall). Projects: 61.3% gross margin, 21.3 points over the 40.0% target ($134,082 ahead on $629,470 this financial year to date).</a:t>
+              <a:t>Services · Projects. June against June last year: 20.0%; Year to date (Jul to Jun 2026): $696,290; Gross margin, year to date: 65.0%. Projects brought in $696,290 this financial year to date, at a 65.0% gross margin (below the 67.0% overall). Projects: 65.0% gross margin, 25.0 points over the 40.0% target ($174,174 ahead on $696,290 this financial year to date).</a:t>
             </a:r>
           </a:p>
         </p:txBody>
@@ -1893,7 +1893,7 @@
           <a:lstStyle/>
           <a:p>
             <a:r>
-              <a:t>Services · Retainers. June against June last year: 49.1%; Year to date (Jul to Jun 2026): $295,800; Gross margin, year to date: 65.4%. Retainers brought in $295,800 this financial year to date, at a 65.4% gross margin (above the 63.6% overall). Retainers: 65.4% gross margin, 25.4 points over the 40.0% target ($75,000 ahead on $295,800 this financial year to date).</a:t>
+              <a:t>Services · Retainers. June against June last year: 48.8%; Year to date (Jul to Jun 2026): $325,000; Gross margin, year to date: 68.5%. Retainers brought in $325,000 this financial year to date, at a 68.5% gross margin (above the 67.0% overall). Retainers: 68.5% gross margin, 28.5 points over the 40.0% target ($92,520 ahead on $325,000 this financial year to date).</a:t>
             </a:r>
           </a:p>
         </p:txBody>
@@ -1963,7 +1963,7 @@
           <a:lstStyle/>
           <a:p>
             <a:r>
-              <a:t>Services · Training. June against June last year: 64.1%; Year to date (Jul to Jun 2026): $82,200; Gross margin, year to date: 74.5%. Training brought in $82,200 this financial year to date, at a 74.5% gross margin (above the 63.6% overall). Training: 74.5% gross margin, 34.5 points over the 40.0% target ($28,320 ahead on $82,200 this financial year to date).</a:t>
+              <a:t>Services · Training. June against June last year: 62.8%; Year to date (Jul to Jun 2026): $90,200; Gross margin, year to date: 76.7%. Training brought in $90,200 this financial year to date, at a 76.7% gross margin (above the 67.0% overall). Training: 76.7% gross margin, 36.7 points over the 40.0% target ($33,120 ahead on $90,200 this financial year to date).</a:t>
             </a:r>
           </a:p>
         </p:txBody>
@@ -2033,7 +2033,7 @@
           <a:lstStyle/>
           <a:p>
             <a:r>
-              <a:t>By type of work: financial year to date (Jul to Jun 2026) against the same period last year · Services. Same period last year: Not available: the data starts October 2024. From gross margin to profit: June's client work made $69,490 gross margin (60.1%). Consultant time not charged to client work took $6,840 and overheads $52,050, leaving $10,600 profit before tax (9.2% of revenue). To cover overheads, client work needs a 51.0% gross margin on average.</a:t>
+              <a:t>By type of work: financial year to date (Jul to Jun 2026) against the same period last year · Services. Same period last year: Not available: the data starts October 2024. From gross margin to profit: June's client work made $81,520 gross margin (63.9%). Consultant time not charged to client work took $20,532 and overheads $52,050, leaving $8,938 profit before tax (7.0% of revenue). To cover overheads, client work needs a 56.9% gross margin on average.</a:t>
             </a:r>
           </a:p>
         </p:txBody>
@@ -5448,7 +5448,7 @@
                 </a:solidFill>
                 <a:latin typeface="Roboto"/>
               </a:rPr>
-              <a:t>Data retrieved 2pm, Tue 6 Oct 2026 · Generated 8 Oct 2026, 9:35am · Sample data · Made with Python (python-pptx)</a:t>
+              <a:t>Data retrieved 2pm, Tue 6 Oct 2026 · Generated 9 Oct 2026, 8:41am · Sample data · Made with Python (python-pptx)</a:t>
             </a:r>
           </a:p>
         </p:txBody>
@@ -5794,7 +5794,7 @@
                 </a:solidFill>
                 <a:latin typeface="Roboto"/>
               </a:rPr>
-              <a:t>28.1%</a:t>
+              <a:t>28.8%</a:t>
             </a:r>
           </a:p>
         </p:txBody>
@@ -5833,7 +5833,7 @@
                 </a:solidFill>
                 <a:latin typeface="Roboto"/>
               </a:rPr>
-              <a:t>$115,550 against $90,220</a:t>
+              <a:t>$127,580 against $99,060</a:t>
             </a:r>
           </a:p>
         </p:txBody>
@@ -5960,7 +5960,7 @@
                 </a:solidFill>
                 <a:latin typeface="Roboto"/>
               </a:rPr>
-              <a:t>$1,007,470</a:t>
+              <a:t>$1,111,490</a:t>
             </a:r>
           </a:p>
         </p:txBody>
@@ -6126,7 +6126,7 @@
                 </a:solidFill>
                 <a:latin typeface="Roboto"/>
               </a:rPr>
-              <a:t>63.6%</a:t>
+              <a:t>67.0%</a:t>
             </a:r>
           </a:p>
         </p:txBody>
@@ -6165,7 +6165,7 @@
                 </a:solidFill>
                 <a:latin typeface="Roboto"/>
               </a:rPr>
-              <a:t>$640,390 before overheads</a:t>
+              <a:t>$744,410 before overheads</a:t>
             </a:r>
           </a:p>
         </p:txBody>
@@ -6310,7 +6310,7 @@
                 </a:solidFill>
                 <a:latin typeface="Roboto"/>
               </a:rPr>
-              <a:t>Revenue is $1,007,470 this financial year to date (Jul to Jun 2026). Training makes the highest gross margin (74.5%); Projects the lowest (61.3%). The business needs 51.0% gross margin just to cover overheads.</a:t>
+              <a:t>Revenue is $1,111,490 this financial year to date (Jul to Jun 2026). Training makes the highest gross margin (76.7%); Projects the lowest (65.0%). The business needs 56.9% gross margin just to cover overheads.</a:t>
             </a:r>
           </a:p>
         </p:txBody>
@@ -6437,7 +6437,7 @@
                 </a:solidFill>
                 <a:latin typeface="Roboto"/>
               </a:rPr>
-              <a:t>Projects: 61.3% gross margin, 21.3 points over the 40.0% target ($134,082 ahead on $629,470 this financial year to date). Training: 74.5% gross margin, 34.5 points over the 40.0% target ($28,320 ahead on $82,200 this financial year to date).</a:t>
+              <a:t>Projects: 65.0% gross margin, 25.0 points over the 40.0% target ($174,174 ahead on $696,290 this financial year to date). Training: 76.7% gross margin, 36.7 points over the 40.0% target ($33,120 ahead on $90,200 this financial year to date).</a:t>
             </a:r>
           </a:p>
         </p:txBody>
@@ -6515,7 +6515,7 @@
                 </a:solidFill>
                 <a:latin typeface="Roboto"/>
               </a:rPr>
-              <a:t>Data retrieved 2pm, Tue 6 Oct 2026 · Generated 8 Oct 2026, 9:35am · Sample data · Made with Python (python-pptx)</a:t>
+              <a:t>Data retrieved 2pm, Tue 6 Oct 2026 · Generated 9 Oct 2026, 8:41am · Sample data · Made with Python (python-pptx)</a:t>
             </a:r>
           </a:p>
         </p:txBody>
@@ -6861,7 +6861,7 @@
                 </a:solidFill>
                 <a:latin typeface="Roboto"/>
               </a:rPr>
-              <a:t>18.8%</a:t>
+              <a:t>20.0%</a:t>
             </a:r>
           </a:p>
         </p:txBody>
@@ -6900,7 +6900,7 @@
                 </a:solidFill>
                 <a:latin typeface="Roboto"/>
               </a:rPr>
-              <a:t>$76,650 against $64,520</a:t>
+              <a:t>$84,880 against $70,760</a:t>
             </a:r>
           </a:p>
         </p:txBody>
@@ -7027,7 +7027,7 @@
                 </a:solidFill>
                 <a:latin typeface="Roboto"/>
               </a:rPr>
-              <a:t>$629,470</a:t>
+              <a:t>$696,290</a:t>
             </a:r>
           </a:p>
         </p:txBody>
@@ -7193,7 +7193,7 @@
                 </a:solidFill>
                 <a:latin typeface="Roboto"/>
               </a:rPr>
-              <a:t>61.3%</a:t>
+              <a:t>65.0%</a:t>
             </a:r>
           </a:p>
         </p:txBody>
@@ -7232,7 +7232,7 @@
                 </a:solidFill>
                 <a:latin typeface="Roboto"/>
               </a:rPr>
-              <a:t>$385,870 before overheads</a:t>
+              <a:t>$452,690 before overheads</a:t>
             </a:r>
           </a:p>
         </p:txBody>
@@ -7377,7 +7377,7 @@
                 </a:solidFill>
                 <a:latin typeface="Roboto"/>
               </a:rPr>
-              <a:t>Projects brought in $629,470 this financial year to date, at a 61.3% gross margin (below the 63.6% overall).</a:t>
+              <a:t>Projects brought in $696,290 this financial year to date, at a 65.0% gross margin (below the 67.0% overall).</a:t>
             </a:r>
           </a:p>
         </p:txBody>
@@ -7504,7 +7504,7 @@
                 </a:solidFill>
                 <a:latin typeface="Roboto"/>
               </a:rPr>
-              <a:t>Projects: 61.3% gross margin, 21.3 points over the 40.0% target ($134,082 ahead on $629,470 this financial year to date).</a:t>
+              <a:t>Projects: 65.0% gross margin, 25.0 points over the 40.0% target ($174,174 ahead on $696,290 this financial year to date).</a:t>
             </a:r>
           </a:p>
         </p:txBody>
@@ -7582,7 +7582,7 @@
                 </a:solidFill>
                 <a:latin typeface="Roboto"/>
               </a:rPr>
-              <a:t>Data retrieved 2pm, Tue 6 Oct 2026 · Generated 8 Oct 2026, 9:35am · Sample data · Made with Python (python-pptx)</a:t>
+              <a:t>Data retrieved 2pm, Tue 6 Oct 2026 · Generated 9 Oct 2026, 8:41am · Sample data · Made with Python (python-pptx)</a:t>
             </a:r>
           </a:p>
         </p:txBody>
@@ -7928,7 +7928,7 @@
                 </a:solidFill>
                 <a:latin typeface="Roboto"/>
               </a:rPr>
-              <a:t>49.1%</a:t>
+              <a:t>48.8%</a:t>
             </a:r>
           </a:p>
         </p:txBody>
@@ -7967,7 +7967,7 @@
                 </a:solidFill>
                 <a:latin typeface="Roboto"/>
               </a:rPr>
-              <a:t>$32,500 against $21,800</a:t>
+              <a:t>$35,700 against $24,000</a:t>
             </a:r>
           </a:p>
         </p:txBody>
@@ -8094,7 +8094,7 @@
                 </a:solidFill>
                 <a:latin typeface="Roboto"/>
               </a:rPr>
-              <a:t>$295,800</a:t>
+              <a:t>$325,000</a:t>
             </a:r>
           </a:p>
         </p:txBody>
@@ -8260,7 +8260,7 @@
                 </a:solidFill>
                 <a:latin typeface="Roboto"/>
               </a:rPr>
-              <a:t>65.4%</a:t>
+              <a:t>68.5%</a:t>
             </a:r>
           </a:p>
         </p:txBody>
@@ -8299,7 +8299,7 @@
                 </a:solidFill>
                 <a:latin typeface="Roboto"/>
               </a:rPr>
-              <a:t>$193,320 before overheads</a:t>
+              <a:t>$222,520 before overheads</a:t>
             </a:r>
           </a:p>
         </p:txBody>
@@ -8444,7 +8444,7 @@
                 </a:solidFill>
                 <a:latin typeface="Roboto"/>
               </a:rPr>
-              <a:t>Retainers brought in $295,800 this financial year to date, at a 65.4% gross margin (above the 63.6% overall).</a:t>
+              <a:t>Retainers brought in $325,000 this financial year to date, at a 68.5% gross margin (above the 67.0% overall).</a:t>
             </a:r>
           </a:p>
         </p:txBody>
@@ -8571,7 +8571,7 @@
                 </a:solidFill>
                 <a:latin typeface="Roboto"/>
               </a:rPr>
-              <a:t>Retainers: 65.4% gross margin, 25.4 points over the 40.0% target ($75,000 ahead on $295,800 this financial year to date).</a:t>
+              <a:t>Retainers: 68.5% gross margin, 28.5 points over the 40.0% target ($92,520 ahead on $325,000 this financial year to date).</a:t>
             </a:r>
           </a:p>
         </p:txBody>
@@ -8649,7 +8649,7 @@
                 </a:solidFill>
                 <a:latin typeface="Roboto"/>
               </a:rPr>
-              <a:t>Data retrieved 2pm, Tue 6 Oct 2026 · Generated 8 Oct 2026, 9:35am · Sample data · Made with Python (python-pptx)</a:t>
+              <a:t>Data retrieved 2pm, Tue 6 Oct 2026 · Generated 9 Oct 2026, 8:41am · Sample data · Made with Python (python-pptx)</a:t>
             </a:r>
           </a:p>
         </p:txBody>
@@ -8995,7 +8995,7 @@
                 </a:solidFill>
                 <a:latin typeface="Roboto"/>
               </a:rPr>
-              <a:t>64.1%</a:t>
+              <a:t>62.8%</a:t>
             </a:r>
           </a:p>
         </p:txBody>
@@ -9034,7 +9034,7 @@
                 </a:solidFill>
                 <a:latin typeface="Roboto"/>
               </a:rPr>
-              <a:t>$6,400 against $3,900</a:t>
+              <a:t>$7,000 against $4,300</a:t>
             </a:r>
           </a:p>
         </p:txBody>
@@ -9161,7 +9161,7 @@
                 </a:solidFill>
                 <a:latin typeface="Roboto"/>
               </a:rPr>
-              <a:t>$82,200</a:t>
+              <a:t>$90,200</a:t>
             </a:r>
           </a:p>
         </p:txBody>
@@ -9327,7 +9327,7 @@
                 </a:solidFill>
                 <a:latin typeface="Roboto"/>
               </a:rPr>
-              <a:t>74.5%</a:t>
+              <a:t>76.7%</a:t>
             </a:r>
           </a:p>
         </p:txBody>
@@ -9366,7 +9366,7 @@
                 </a:solidFill>
                 <a:latin typeface="Roboto"/>
               </a:rPr>
-              <a:t>$61,200 before overheads</a:t>
+              <a:t>$69,200 before overheads</a:t>
             </a:r>
           </a:p>
         </p:txBody>
@@ -9511,7 +9511,7 @@
                 </a:solidFill>
                 <a:latin typeface="Roboto"/>
               </a:rPr>
-              <a:t>Training brought in $82,200 this financial year to date, at a 74.5% gross margin (above the 63.6% overall).</a:t>
+              <a:t>Training brought in $90,200 this financial year to date, at a 76.7% gross margin (above the 67.0% overall).</a:t>
             </a:r>
           </a:p>
         </p:txBody>
@@ -9638,7 +9638,7 @@
                 </a:solidFill>
                 <a:latin typeface="Roboto"/>
               </a:rPr>
-              <a:t>Training: 74.5% gross margin, 34.5 points over the 40.0% target ($28,320 ahead on $82,200 this financial year to date).</a:t>
+              <a:t>Training: 76.7% gross margin, 36.7 points over the 40.0% target ($33,120 ahead on $90,200 this financial year to date).</a:t>
             </a:r>
           </a:p>
         </p:txBody>
@@ -9716,7 +9716,7 @@
                 </a:solidFill>
                 <a:latin typeface="Roboto"/>
               </a:rPr>
-              <a:t>Data retrieved 2pm, Tue 6 Oct 2026 · Generated 8 Oct 2026, 9:35am · Sample data · Made with Python (python-pptx)</a:t>
+              <a:t>Data retrieved 2pm, Tue 6 Oct 2026 · Generated 9 Oct 2026, 8:41am · Sample data · Made with Python (python-pptx)</a:t>
             </a:r>
           </a:p>
         </p:txBody>
@@ -9935,7 +9935,7 @@
                 </a:solidFill>
                 <a:latin typeface="Roboto"/>
               </a:rPr>
-              <a:t>Same period last year: Not available: the data starts October 2024. From gross margin to profit: June's client work made $69,490 gross margin (60.1%). Consultant time not charged to client work took $6,840 and overheads $52,050, leaving $10,600 profit before tax (9.2% of revenue). To cover overheads, client work needs a 51.0% gross margin on average.</a:t>
+              <a:t>Same period last year: Not available: the data starts October 2024. From gross margin to profit: June's client work made $81,520 gross margin (63.9%). Consultant time not charged to client work took $20,532 and overheads $52,050, leaving $8,938 profit before tax (7.0% of revenue). To cover overheads, client work needs a 56.9% gross margin on average.</a:t>
             </a:r>
           </a:p>
         </p:txBody>
@@ -10166,7 +10166,7 @@
                           </a:solidFill>
                           <a:latin typeface="Roboto"/>
                         </a:rPr>
-                        <a:t>$629,470</a:t>
+                        <a:t>$696,290</a:t>
                       </a:r>
                     </a:p>
                   </a:txBody>
@@ -10247,7 +10247,7 @@
                           </a:solidFill>
                           <a:latin typeface="Roboto"/>
                         </a:rPr>
-                        <a:t>$385,870</a:t>
+                        <a:t>$452,690</a:t>
                       </a:r>
                     </a:p>
                   </a:txBody>
@@ -10274,7 +10274,7 @@
                           </a:solidFill>
                           <a:latin typeface="Roboto"/>
                         </a:rPr>
-                        <a:t>61.3%</a:t>
+                        <a:t>65.0%</a:t>
                       </a:r>
                     </a:p>
                   </a:txBody>
@@ -10330,7 +10330,7 @@
                           </a:solidFill>
                           <a:latin typeface="Roboto"/>
                         </a:rPr>
-                        <a:t>$295,800</a:t>
+                        <a:t>$325,000</a:t>
                       </a:r>
                     </a:p>
                   </a:txBody>
@@ -10411,7 +10411,7 @@
                           </a:solidFill>
                           <a:latin typeface="Roboto"/>
                         </a:rPr>
-                        <a:t>$193,320</a:t>
+                        <a:t>$222,520</a:t>
                       </a:r>
                     </a:p>
                   </a:txBody>
@@ -10438,7 +10438,7 @@
                           </a:solidFill>
                           <a:latin typeface="Roboto"/>
                         </a:rPr>
-                        <a:t>65.4%</a:t>
+                        <a:t>68.5%</a:t>
                       </a:r>
                     </a:p>
                   </a:txBody>
@@ -10494,7 +10494,7 @@
                           </a:solidFill>
                           <a:latin typeface="Roboto"/>
                         </a:rPr>
-                        <a:t>$82,200</a:t>
+                        <a:t>$90,200</a:t>
                       </a:r>
                     </a:p>
                   </a:txBody>
@@ -10575,7 +10575,7 @@
                           </a:solidFill>
                           <a:latin typeface="Roboto"/>
                         </a:rPr>
-                        <a:t>$61,200</a:t>
+                        <a:t>$69,200</a:t>
                       </a:r>
                     </a:p>
                   </a:txBody>
@@ -10602,7 +10602,7 @@
                           </a:solidFill>
                           <a:latin typeface="Roboto"/>
                         </a:rPr>
-                        <a:t>74.5%</a:t>
+                        <a:t>76.7%</a:t>
                       </a:r>
                     </a:p>
                   </a:txBody>
@@ -10658,7 +10658,7 @@
                           </a:solidFill>
                           <a:latin typeface="Roboto"/>
                         </a:rPr>
-                        <a:t>$1,007,470</a:t>
+                        <a:t>$1,111,490</a:t>
                       </a:r>
                     </a:p>
                   </a:txBody>
@@ -10739,7 +10739,7 @@
                           </a:solidFill>
                           <a:latin typeface="Roboto"/>
                         </a:rPr>
-                        <a:t>$640,390</a:t>
+                        <a:t>$744,410</a:t>
                       </a:r>
                     </a:p>
                   </a:txBody>
@@ -10766,7 +10766,7 @@
                           </a:solidFill>
                           <a:latin typeface="Roboto"/>
                         </a:rPr>
-                        <a:t>63.6%</a:t>
+                        <a:t>67.0%</a:t>
                       </a:r>
                     </a:p>
                   </a:txBody>
@@ -10854,7 +10854,7 @@
                 </a:solidFill>
                 <a:latin typeface="Roboto"/>
               </a:rPr>
-              <a:t>Data retrieved 2pm, Tue 6 Oct 2026 · Generated 8 Oct 2026, 9:35am · Sample data · Made with Python (python-pptx)</a:t>
+              <a:t>Data retrieved 2pm, Tue 6 Oct 2026 · Generated 9 Oct 2026, 8:41am · Sample data · Made with Python (python-pptx)</a:t>
             </a:r>
           </a:p>
         </p:txBody>
